--- a/docs/resources/slides/public/1sw-wk3-day4.pptx
+++ b/docs/resources/slides/public/1sw-wk3-day4.pptx
@@ -1638,7 +1638,7 @@
                 <a:ea typeface="Arial Black" pitchFamily="34" charset="-122"/>
                 <a:cs typeface="Arial Black" pitchFamily="34" charset="-120"/>
               </a:rPr>
-              <a:t>New job, or new name?</a:t>
+              <a:t>Emerging IT careers</a:t>
             </a:r>
             <a:endParaRPr lang="en-US" sz="6000" dirty="0"/>
           </a:p>
@@ -1677,7 +1677,7 @@
                 <a:ea typeface="Arial" pitchFamily="34" charset="-122"/>
                 <a:cs typeface="Arial" pitchFamily="34" charset="-120"/>
               </a:rPr>
-              <a:t>Emerging IT careers, with evidence.</a:t>
+              <a:t>Research one with dated evidence.</a:t>
             </a:r>
             <a:endParaRPr lang="en-US" sz="3000" dirty="0"/>
           </a:p>
